--- a/decks/geog-economic-world/geog-economic-world_ch2_population-change.pptx
+++ b/decks/geog-economic-world/geog-economic-world_ch2_population-change.pptx
@@ -125,29 +125,29 @@
   <p:extLst>
     <p:ext uri="{521415D9-36F7-43E2-AB2F-B90AF26B5E84}">
       <p14:sectionLst xmlns:p14="http://schemas.microsoft.com/office/powerpoint/2010/main">
-        <p14:section name="Opening" id="{ca637a8f-9201-57e0-4844-d7e470b163a2}">
+        <p14:section name="Opening" id="{655e57ee-35fd-b9fc-55e8-52ff07caeb28}">
           <p14:sldIdLst>
             <p14:sldId id="256"/>
           </p14:sldIdLst>
         </p14:section>
-        <p14:section name="Gate" id="{03647136-3c97-bef5-f114-5b6f02f29b4a}">
+        <p14:section name="Gate" id="{5b9d6d55-aef1-771a-f0ef-23f38ca358ce}">
           <p14:sldIdLst>
             <p14:sldId id="257"/>
             <p14:sldId id="258"/>
           </p14:sldIdLst>
         </p14:section>
-        <p14:section name="Pre-teach" id="{65c11d84-7590-5ed4-d093-33f80a01430e}">
+        <p14:section name="Pre-teach" id="{56d5b0e2-411a-c405-8e13-da227dfadcc2}">
           <p14:sldIdLst>
             <p14:sldId id="259"/>
           </p14:sldIdLst>
         </p14:section>
-        <p14:section name="Read-along" id="{c3332994-d3de-01e1-039b-f9318e1db303}">
+        <p14:section name="Read-along" id="{4c7c61a9-87fa-195b-6be0-f880e168fd02}">
           <p14:sldIdLst>
             <p14:sldId id="260"/>
             <p14:sldId id="261"/>
           </p14:sldIdLst>
         </p14:section>
-        <p14:section name="Teach" id="{ac0d6d6d-83cb-c47d-504e-e6b7f98d123a}">
+        <p14:section name="Teach" id="{606d3510-d5d9-4e34-230b-114b56d3dc9c}">
           <p14:sldIdLst>
             <p14:sldId id="262"/>
             <p14:sldId id="263"/>
@@ -156,7 +156,7 @@
             <p14:sldId id="266"/>
           </p14:sldIdLst>
         </p14:section>
-        <p14:section name="Routes" id="{7a184092-e1cf-d938-183f-eba0ae9c05f9}">
+        <p14:section name="Routes" id="{7cdaa297-123d-0ff1-5008-ac9b0cc9c68f}">
           <p14:sldIdLst>
             <p14:sldId id="267"/>
             <p14:sldId id="268"/>
@@ -164,12 +164,12 @@
             <p14:sldId id="270"/>
           </p14:sldIdLst>
         </p14:section>
-        <p14:section name="Close" id="{4e8b13a5-2771-d81d-ad0d-090ba4e5c550}">
+        <p14:section name="Close" id="{7ffb071f-7c16-8480-0176-7e6a7f4aeea9}">
           <p14:sldIdLst>
             <p14:sldId id="271"/>
           </p14:sldIdLst>
         </p14:section>
-        <p14:section name="Answers" id="{0410c51d-3139-c337-631e-607fb2906890}">
+        <p14:section name="Answers" id="{f19c65d6-cbd7-5619-0858-7303a2fa7876}">
           <p14:sldIdLst>
             <p14:sldId id="272"/>
             <p14:sldId id="273"/>
@@ -673,7 +673,7 @@
               <a:rPr lang="en-US" dirty="0"/>
               <a:t>Teach — Reading a population pyramid. Say it in your own words, then check understanding with a quick question: ask a pupil from the pre-teach group first, since they met these words and ideas before the lesson. Pupils try to recall before you re-explain.
 A population pyramid shows the structure of a population. The bars are age groups, stacked from the youngest at the bottom to the oldest at the top, and they are split down the middle into males on one side and females on the other. The length of each bar is the percentage of the whole population in that age and sex group, so you can read a figure straight off it: a bar reaching 4 on the female side at ages 25 to 29 tells you that 4 in every 100 people in the country are women of that age.
-A pyramid for a high income country has a narrow base, a wider middle and stays quite wide at the top. The narrow base means the birth rate is low; the wide middle means people are living longer and fewer babies are dying; the wide top means a long life expectancy, with more older women than men. Italy and Japan have pyramids this shape. A pyramid for a low income country has a wide base, which means a large proportion of young people, and becomes narrow very quickly towards the top, which means few elderly people and a lower life expectancy. Kenya, Ethiopia and Vietnam have pyramids this shape.
+A pyramid for a high income country has a narrow base, bulges in the middle and stays fairly wide right at the top. The narrow base means the birth rate is low; the wide middle means people are living longer and fewer babies are dying; the wide top means a long life expectancy, with more older women than men. Italy and Japan have pyramids this shape. A pyramid for a low income country has a wide base, which means a large proportion of young people, and becomes narrow very quickly towards the top, which means few elderly people and a lower life expectancy. Kenya, Ethiopia and Vietnam have pyramids this shape.
 The dependency ratio compares the people who are not of working age, those aged 0 to 14 and those over 65, with the people who are. A wide-based pyramid and a wide-topped pyramid both give a high dependency ratio, but for opposite reasons: in the first case a country has many children to feed and educate, and in the second it has many pensioners to support. That is why the shape of the pyramid matters so much to a government planning schools, hospitals and pensions.
 Tip: Describe a pyramid in three moves: the base, the middle, the top. For each one say what the shape is and what it tells you about births, deaths or life expectancy.</a:t>
             </a:r>
@@ -2071,9 +2071,9 @@
             <a:r>
               <a:rPr lang="en-US" dirty="0"/>
               <a:t>Teach — The five stages of the demographic transition model. Say it in your own words, then check understanding with a quick question: ask a pupil from the pre-teach group first, since they met these words and ideas before the lesson. Pupils try to recall before you re-explain.
-The demographic transition model, or DTM, shows the changes to a population over time. Demographic means to do with people and numbers; transition means a change from one state to another. It is a model, which means it is not designed to follow one specific country or area: it shows the pattern that populations usually follow. It is broken into five stages, each with its own conditions, and you can judge a country's level of development by working out where it would sit on the model.
+The demographic transition model, or DTM, is a way of showing how a population alters as a country develops. Demographic means to do with people and numbers; transition means a change from one state to another. It is a model, which means it is not designed to follow one specific country or area: it shows the pattern that populations usually follow. It is broken into five stages, each with its own conditions, and you can judge a country's level of development by working out where it would sit on the model.
 In stage 1 the birth rate is high, with many babies being born, and the death rate is high too, with many people dying young. Because the two cancel each other out, the total population stays low and steady; it may rise and fall with war, famine or disease. Very few places in the world are still at this stage, although small groups living in the Amazon rainforest may be. In stage 2 the death rate falls while the birth rate stays high, so the total population begins to grow rapidly. Afghanistan is a stage 2 country, and this is common in many low income countries. In stage 3 the birth rate falls as well, and the death rate keeps falling but more slowly. The population still grows, but more slowly than before. Nigeria, a newly emerging economy, is the example to remember.
-In stage 4 the birth rate stays low and the death rate is low, so the population is high and steady. The birth rate can rise and fall with the economy: when times are good, families feel they can afford more children. The United States is a stage 4 country, with healthcare available at a cost and a high number of women following careers. In stage 5 the birth rate falls below the death rate for the first time. The death rate rises slightly because the population is ageing, and the overall population starts to fall. There may be migration into the country to make up the shortfall. Japan is the example to remember, and Germany is at this stage too.
+In stage 4 the birth rate stays low and the death rate is low, so the population is high and steady. The birth rate can rise and fall with the economy: when times are good, families feel they can afford more children. The United States is a stage 4 country, with healthcare available at a cost and a high number of women following careers. In stage 5 the birth rate drops under the death rate for the first time. The death rate creeps up because the population is ageing, and the overall population starts to fall. There may be migration into the country to make up the shortfall. Japan is the example to remember, and Germany is at this stage too.
 Tip: Learn the stages by what the two lines are doing, not by the numbers: stage 1 both high, stage 2 death rate falling, stage 3 birth rate falling, stage 4 both low, stage 5 birth rate below death rate.</a:t>
             </a:r>
             <a:endParaRPr lang="en-US" dirty="0"/>
@@ -4417,7 +4417,7 @@
                 <a:ea typeface="Calibri" pitchFamily="34" charset="-122"/>
                 <a:cs typeface="Calibri" pitchFamily="34" charset="-120"/>
               </a:rPr>
-              <a:t>A pyramid for a high income country has a narrow base, a wider middle and stays quite wide at the top.</a:t>
+              <a:t>A pyramid for a high income country has a narrow base, bulges in the middle and stays fairly wide right at the top.</a:t>
             </a:r>
             <a:endParaRPr lang="en-US" sz="1800" dirty="0"/>
           </a:p>
@@ -15341,7 +15341,7 @@
                 <a:ea typeface="Calibri" pitchFamily="34" charset="-122"/>
                 <a:cs typeface="Calibri" pitchFamily="34" charset="-120"/>
               </a:rPr>
-              <a:t>The demographic transition model, or DTM, shows the changes to a population over time.</a:t>
+              <a:t>The demographic transition model, or DTM, is a way of showing how a population alters as a country develops.</a:t>
             </a:r>
             <a:endParaRPr lang="en-US" sz="2400" dirty="0"/>
           </a:p>
